--- a/previsao_casas_apresentacao.pptx
+++ b/previsao_casas_apresentacao.pptx
@@ -5,7 +5,7 @@
     <p:sldMasterId id="2147483648" r:id="rId1"/>
   </p:sldMasterIdLst>
   <p:notesMasterIdLst>
-    <p:notesMasterId r:id="rId11"/>
+    <p:notesMasterId r:id="rId10"/>
   </p:notesMasterIdLst>
   <p:sldIdLst>
     <p:sldId id="256" r:id="rId2"/>
@@ -16,7 +16,6 @@
     <p:sldId id="261" r:id="rId7"/>
     <p:sldId id="262" r:id="rId8"/>
     <p:sldId id="263" r:id="rId9"/>
-    <p:sldId id="264" r:id="rId10"/>
   </p:sldIdLst>
   <p:sldSz cx="9144000" cy="5143500" type="screen16x9"/>
   <p:notesSz cx="5143500" cy="9144000"/>
@@ -124,13 +123,13 @@
 <pc:chgInfo xmlns:a="http://schemas.openxmlformats.org/drawingml/2006/main" xmlns:r="http://schemas.openxmlformats.org/officeDocument/2006/relationships" xmlns:ac="http://schemas.microsoft.com/office/drawing/2013/main/command" xmlns:pc="http://schemas.microsoft.com/office/powerpoint/2013/main/command">
   <pc:docChgLst>
     <pc:chgData name="Sadjo Djalo" userId="50adb5ebaf8edbd5" providerId="LiveId" clId="{F9ADE3B7-96A7-4AFD-9629-82E79260D754}"/>
-    <pc:docChg chg="modSld">
-      <pc:chgData name="Sadjo Djalo" userId="50adb5ebaf8edbd5" providerId="LiveId" clId="{F9ADE3B7-96A7-4AFD-9629-82E79260D754}" dt="2026-06-09T09:14:16.644" v="24" actId="20577"/>
+    <pc:docChg chg="custSel delSld modSld">
+      <pc:chgData name="Sadjo Djalo" userId="50adb5ebaf8edbd5" providerId="LiveId" clId="{F9ADE3B7-96A7-4AFD-9629-82E79260D754}" dt="2026-06-09T10:10:23.640" v="60" actId="20577"/>
       <pc:docMkLst>
         <pc:docMk/>
       </pc:docMkLst>
       <pc:sldChg chg="modSp mod">
-        <pc:chgData name="Sadjo Djalo" userId="50adb5ebaf8edbd5" providerId="LiveId" clId="{F9ADE3B7-96A7-4AFD-9629-82E79260D754}" dt="2026-06-09T08:53:51.710" v="11" actId="20577"/>
+        <pc:chgData name="Sadjo Djalo" userId="50adb5ebaf8edbd5" providerId="LiveId" clId="{F9ADE3B7-96A7-4AFD-9629-82E79260D754}" dt="2026-06-09T10:10:23.640" v="60" actId="20577"/>
         <pc:sldMkLst>
           <pc:docMk/>
           <pc:sldMk cId="0" sldId="256"/>
@@ -141,6 +140,14 @@
             <pc:docMk/>
             <pc:sldMk cId="0" sldId="256"/>
             <ac:spMk id="3" creationId="{00000000-0000-0000-0000-000000000000}"/>
+          </ac:spMkLst>
+        </pc:spChg>
+        <pc:spChg chg="mod">
+          <ac:chgData name="Sadjo Djalo" userId="50adb5ebaf8edbd5" providerId="LiveId" clId="{F9ADE3B7-96A7-4AFD-9629-82E79260D754}" dt="2026-06-09T10:10:23.640" v="60" actId="20577"/>
+          <ac:spMkLst>
+            <pc:docMk/>
+            <pc:sldMk cId="0" sldId="256"/>
+            <ac:spMk id="7" creationId="{00000000-0000-0000-0000-000000000000}"/>
           </ac:spMkLst>
         </pc:spChg>
       </pc:sldChg>
@@ -166,6 +173,68 @@
             <ac:spMk id="14" creationId="{00000000-0000-0000-0000-000000000000}"/>
           </ac:spMkLst>
         </pc:spChg>
+      </pc:sldChg>
+      <pc:sldChg chg="delSp modSp mod">
+        <pc:chgData name="Sadjo Djalo" userId="50adb5ebaf8edbd5" providerId="LiveId" clId="{F9ADE3B7-96A7-4AFD-9629-82E79260D754}" dt="2026-06-09T10:08:08.782" v="33" actId="1076"/>
+        <pc:sldMkLst>
+          <pc:docMk/>
+          <pc:sldMk cId="0" sldId="262"/>
+        </pc:sldMkLst>
+        <pc:spChg chg="del">
+          <ac:chgData name="Sadjo Djalo" userId="50adb5ebaf8edbd5" providerId="LiveId" clId="{F9ADE3B7-96A7-4AFD-9629-82E79260D754}" dt="2026-06-09T10:07:33.674" v="27" actId="478"/>
+          <ac:spMkLst>
+            <pc:docMk/>
+            <pc:sldMk cId="0" sldId="262"/>
+            <ac:spMk id="20" creationId="{00000000-0000-0000-0000-000000000000}"/>
+          </ac:spMkLst>
+        </pc:spChg>
+        <pc:spChg chg="del">
+          <ac:chgData name="Sadjo Djalo" userId="50adb5ebaf8edbd5" providerId="LiveId" clId="{F9ADE3B7-96A7-4AFD-9629-82E79260D754}" dt="2026-06-09T10:07:43.103" v="29" actId="478"/>
+          <ac:spMkLst>
+            <pc:docMk/>
+            <pc:sldMk cId="0" sldId="262"/>
+            <ac:spMk id="21" creationId="{00000000-0000-0000-0000-000000000000}"/>
+          </ac:spMkLst>
+        </pc:spChg>
+        <pc:spChg chg="del">
+          <ac:chgData name="Sadjo Djalo" userId="50adb5ebaf8edbd5" providerId="LiveId" clId="{F9ADE3B7-96A7-4AFD-9629-82E79260D754}" dt="2026-06-09T10:07:41.194" v="28" actId="21"/>
+          <ac:spMkLst>
+            <pc:docMk/>
+            <pc:sldMk cId="0" sldId="262"/>
+            <ac:spMk id="22" creationId="{00000000-0000-0000-0000-000000000000}"/>
+          </ac:spMkLst>
+        </pc:spChg>
+        <pc:spChg chg="mod">
+          <ac:chgData name="Sadjo Djalo" userId="50adb5ebaf8edbd5" providerId="LiveId" clId="{F9ADE3B7-96A7-4AFD-9629-82E79260D754}" dt="2026-06-09T10:07:47.917" v="30" actId="1076"/>
+          <ac:spMkLst>
+            <pc:docMk/>
+            <pc:sldMk cId="0" sldId="262"/>
+            <ac:spMk id="23" creationId="{00000000-0000-0000-0000-000000000000}"/>
+          </ac:spMkLst>
+        </pc:spChg>
+        <pc:spChg chg="mod">
+          <ac:chgData name="Sadjo Djalo" userId="50adb5ebaf8edbd5" providerId="LiveId" clId="{F9ADE3B7-96A7-4AFD-9629-82E79260D754}" dt="2026-06-09T10:08:01.816" v="32" actId="1076"/>
+          <ac:spMkLst>
+            <pc:docMk/>
+            <pc:sldMk cId="0" sldId="262"/>
+            <ac:spMk id="24" creationId="{00000000-0000-0000-0000-000000000000}"/>
+          </ac:spMkLst>
+        </pc:spChg>
+        <pc:spChg chg="mod">
+          <ac:chgData name="Sadjo Djalo" userId="50adb5ebaf8edbd5" providerId="LiveId" clId="{F9ADE3B7-96A7-4AFD-9629-82E79260D754}" dt="2026-06-09T10:08:08.782" v="33" actId="1076"/>
+          <ac:spMkLst>
+            <pc:docMk/>
+            <pc:sldMk cId="0" sldId="262"/>
+            <ac:spMk id="25" creationId="{00000000-0000-0000-0000-000000000000}"/>
+          </ac:spMkLst>
+        </pc:spChg>
+      </pc:sldChg>
+      <pc:sldChg chg="del">
+        <pc:chgData name="Sadjo Djalo" userId="50adb5ebaf8edbd5" providerId="LiveId" clId="{F9ADE3B7-96A7-4AFD-9629-82E79260D754}" dt="2026-06-09T10:08:35.354" v="34" actId="47"/>
+        <pc:sldMkLst>
+          <pc:docMk/>
+          <pc:sldMk cId="0" sldId="264"/>
+        </pc:sldMkLst>
       </pc:sldChg>
     </pc:docChg>
   </pc:docChgLst>
@@ -980,93 +1049,6 @@
             <a:fld id="{F7021451-1387-4CA6-816F-3879F97B5CBC}" type="slidenum">
               <a:rPr lang="en-US"/>
               <a:t>8</a:t>
-            </a:fld>
-            <a:endParaRPr lang="en-US"/>
-          </a:p>
-        </p:txBody>
-      </p:sp>
-    </p:spTree>
-    <p:extLst>
-      <p:ext uri="{BB962C8B-B14F-4D97-AF65-F5344CB8AC3E}">
-        <p14:creationId xmlns:p14="http://schemas.microsoft.com/office/powerpoint/2010/main" val="1024086991"/>
-      </p:ext>
-    </p:extLst>
-  </p:cSld>
-  <p:clrMapOvr>
-    <a:masterClrMapping/>
-  </p:clrMapOvr>
-</p:notes>
-</file>
-
-<file path=ppt/notesSlides/notesSlide9.xml><?xml version="1.0" encoding="utf-8"?>
-<p:notes xmlns:a="http://schemas.openxmlformats.org/drawingml/2006/main" xmlns:r="http://schemas.openxmlformats.org/officeDocument/2006/relationships" xmlns:p="http://schemas.openxmlformats.org/presentationml/2006/main">
-  <p:cSld>
-    <p:spTree>
-      <p:nvGrpSpPr>
-        <p:cNvPr id="1" name=""/>
-        <p:cNvGrpSpPr/>
-        <p:nvPr/>
-      </p:nvGrpSpPr>
-      <p:grpSpPr>
-        <a:xfrm>
-          <a:off x="0" y="0"/>
-          <a:ext cx="0" cy="0"/>
-          <a:chOff x="0" y="0"/>
-          <a:chExt cx="0" cy="0"/>
-        </a:xfrm>
-      </p:grpSpPr>
-      <p:sp>
-        <p:nvSpPr>
-          <p:cNvPr id="2" name="Slide Image Placeholder 1"/>
-          <p:cNvSpPr>
-            <a:spLocks noGrp="1" noRot="1" noChangeAspect="1"/>
-          </p:cNvSpPr>
-          <p:nvPr>
-            <p:ph type="sldImg"/>
-          </p:nvPr>
-        </p:nvSpPr>
-        <p:spPr/>
-      </p:sp>
-      <p:sp>
-        <p:nvSpPr>
-          <p:cNvPr id="3" name="Notes Placeholder 2"/>
-          <p:cNvSpPr>
-            <a:spLocks noGrp="1"/>
-          </p:cNvSpPr>
-          <p:nvPr>
-            <p:ph type="body" idx="1"/>
-          </p:nvPr>
-        </p:nvSpPr>
-        <p:spPr/>
-        <p:txBody>
-          <a:bodyPr/>
-          <a:lstStyle/>
-          <a:p>
-            <a:r>
-              <a:rPr lang="en-US" dirty="0"/>
-              <a:t>Slide de apoio para o Q&amp;A. Não mostrar necessariamente — usar como referência se o docente fizer estas perguntas.</a:t>
-            </a:r>
-          </a:p>
-        </p:txBody>
-      </p:sp>
-      <p:sp>
-        <p:nvSpPr>
-          <p:cNvPr id="4" name="Slide Number Placeholder 3"/>
-          <p:cNvSpPr>
-            <a:spLocks noGrp="1"/>
-          </p:cNvSpPr>
-          <p:nvPr>
-            <p:ph type="sldNum" sz="quarter" idx="10"/>
-          </p:nvPr>
-        </p:nvSpPr>
-        <p:spPr/>
-        <p:txBody>
-          <a:bodyPr/>
-          <a:lstStyle/>
-          <a:p>
-            <a:fld id="{F7021451-1387-4CA6-816F-3879F97B5CBC}" type="slidenum">
-              <a:rPr lang="en-US"/>
-              <a:t>9</a:t>
             </a:fld>
             <a:endParaRPr lang="en-US"/>
           </a:p>
@@ -1742,7 +1724,40 @@
                 <a:ea typeface="Calibri" pitchFamily="34" charset="-122"/>
                 <a:cs typeface="Calibri" pitchFamily="34" charset="-120"/>
               </a:rPr>
-              <a:t>Bemvindo Elias · Sadjo Djalo · João Francisco</a:t>
+              <a:t>Bemvindo </a:t>
+            </a:r>
+            <a:r>
+              <a:rPr lang="en-US" sz="1100">
+                <a:solidFill>
+                  <a:srgbClr val="7FB3D3"/>
+                </a:solidFill>
+                <a:latin typeface="Calibri" pitchFamily="34" charset="0"/>
+                <a:ea typeface="Calibri" pitchFamily="34" charset="-122"/>
+                <a:cs typeface="Calibri" pitchFamily="34" charset="-120"/>
+              </a:rPr>
+              <a:t>Elias a22510911 · Sadjo Djalo a22502320 </a:t>
+            </a:r>
+            <a:r>
+              <a:rPr lang="en-US" sz="1100" dirty="0">
+                <a:solidFill>
+                  <a:srgbClr val="7FB3D3"/>
+                </a:solidFill>
+                <a:latin typeface="Calibri" pitchFamily="34" charset="0"/>
+                <a:ea typeface="Calibri" pitchFamily="34" charset="-122"/>
+                <a:cs typeface="Calibri" pitchFamily="34" charset="-120"/>
+              </a:rPr>
+              <a:t>· </a:t>
+            </a:r>
+            <a:r>
+              <a:rPr lang="en-US" sz="1100">
+                <a:solidFill>
+                  <a:srgbClr val="7FB3D3"/>
+                </a:solidFill>
+                <a:latin typeface="Calibri" pitchFamily="34" charset="0"/>
+                <a:ea typeface="Calibri" pitchFamily="34" charset="-122"/>
+                <a:cs typeface="Calibri" pitchFamily="34" charset="-120"/>
+              </a:rPr>
+              <a:t>João Francisco a</a:t>
             </a:r>
             <a:endParaRPr lang="en-US" sz="1100" dirty="0"/>
           </a:p>
@@ -7232,13 +7247,13 @@
       </p:sp>
       <p:sp>
         <p:nvSpPr>
-          <p:cNvPr id="20" name="Shape 18"/>
-          <p:cNvSpPr/>
-          <p:nvPr/>
-        </p:nvSpPr>
-        <p:spPr>
-          <a:xfrm>
-            <a:off x="3291840" y="3017520"/>
+          <p:cNvPr id="23" name="Shape 21"/>
+          <p:cNvSpPr/>
+          <p:nvPr/>
+        </p:nvSpPr>
+        <p:spPr>
+          <a:xfrm>
+            <a:off x="3474720" y="2999232"/>
             <a:ext cx="2651760" cy="1737360"/>
           </a:xfrm>
           <a:prstGeom prst="roundRect">
@@ -7273,13 +7288,13 @@
       </p:sp>
       <p:sp>
         <p:nvSpPr>
-          <p:cNvPr id="21" name="Text 19"/>
-          <p:cNvSpPr/>
-          <p:nvPr/>
-        </p:nvSpPr>
-        <p:spPr>
-          <a:xfrm>
-            <a:off x="3383280" y="3090672"/>
+          <p:cNvPr id="24" name="Text 22"/>
+          <p:cNvSpPr/>
+          <p:nvPr/>
+        </p:nvSpPr>
+        <p:spPr>
+          <a:xfrm>
+            <a:off x="3566160" y="3054096"/>
             <a:ext cx="2468880" cy="347472"/>
           </a:xfrm>
           <a:prstGeom prst="rect">
@@ -7304,7 +7319,7 @@
                 <a:ea typeface="Calibri" pitchFamily="34" charset="-122"/>
                 <a:cs typeface="Calibri" pitchFamily="34" charset="-120"/>
               </a:rPr>
-              <a:t>Dados heterogéneos</a:t>
+              <a:t>Features insuficientes</a:t>
             </a:r>
             <a:endParaRPr lang="en-US" sz="1200" dirty="0"/>
           </a:p>
@@ -7312,132 +7327,13 @@
       </p:sp>
       <p:sp>
         <p:nvSpPr>
-          <p:cNvPr id="22" name="Text 20"/>
-          <p:cNvSpPr/>
-          <p:nvPr/>
-        </p:nvSpPr>
-        <p:spPr>
-          <a:xfrm>
-            <a:off x="3383280" y="3456432"/>
-            <a:ext cx="2468880" cy="1143000"/>
-          </a:xfrm>
-          <a:prstGeom prst="rect">
-            <a:avLst/>
-          </a:prstGeom>
-          <a:noFill/>
-          <a:ln/>
-        </p:spPr>
-        <p:txBody>
-          <a:bodyPr wrap="square" rtlCol="0" anchor="ctr"/>
-          <a:lstStyle/>
-          <a:p>
-            <a:pPr marL="0" indent="0">
-              <a:buNone/>
-            </a:pPr>
-            <a:r>
-              <a:rPr lang="en-US" sz="1100" dirty="0">
-                <a:solidFill>
-                  <a:srgbClr val="1C2833"/>
-                </a:solidFill>
-                <a:latin typeface="Calibri" pitchFamily="34" charset="0"/>
-                <a:ea typeface="Calibri" pitchFamily="34" charset="-122"/>
-                <a:cs typeface="Calibri" pitchFamily="34" charset="-120"/>
-              </a:rPr>
-              <a:t>Mistura de venda (300.000€) e arrendamento (400€) sem etiqueta explícita</a:t>
-            </a:r>
-            <a:endParaRPr lang="en-US" sz="1100" dirty="0"/>
-          </a:p>
-        </p:txBody>
-      </p:sp>
-      <p:sp>
-        <p:nvSpPr>
-          <p:cNvPr id="23" name="Shape 21"/>
-          <p:cNvSpPr/>
-          <p:nvPr/>
-        </p:nvSpPr>
-        <p:spPr>
-          <a:xfrm>
-            <a:off x="6217920" y="3017520"/>
-            <a:ext cx="2651760" cy="1737360"/>
-          </a:xfrm>
-          <a:prstGeom prst="roundRect">
-            <a:avLst>
-              <a:gd name="adj" fmla="val 4211"/>
-            </a:avLst>
-          </a:prstGeom>
-          <a:solidFill>
-            <a:srgbClr val="FEF9E7"/>
-          </a:solidFill>
-          <a:ln w="12700">
-            <a:solidFill>
-              <a:srgbClr val="D4AC0D"/>
-            </a:solidFill>
-            <a:prstDash val="solid"/>
-          </a:ln>
-          <a:effectLst>
-            <a:outerShdw blurRad="76200" dist="25400" dir="2700000" algn="bl" rotWithShape="0">
-              <a:srgbClr val="000000">
-                <a:alpha val="12000"/>
-              </a:srgbClr>
-            </a:outerShdw>
-          </a:effectLst>
-        </p:spPr>
-        <p:txBody>
-          <a:bodyPr/>
-          <a:lstStyle/>
-          <a:p>
-            <a:endParaRPr lang="pt-PT"/>
-          </a:p>
-        </p:txBody>
-      </p:sp>
-      <p:sp>
-        <p:nvSpPr>
-          <p:cNvPr id="24" name="Text 22"/>
-          <p:cNvSpPr/>
-          <p:nvPr/>
-        </p:nvSpPr>
-        <p:spPr>
-          <a:xfrm>
-            <a:off x="6309360" y="3090672"/>
-            <a:ext cx="2468880" cy="347472"/>
-          </a:xfrm>
-          <a:prstGeom prst="rect">
-            <a:avLst/>
-          </a:prstGeom>
-          <a:noFill/>
-          <a:ln/>
-        </p:spPr>
-        <p:txBody>
-          <a:bodyPr wrap="square" rtlCol="0" anchor="ctr"/>
-          <a:lstStyle/>
-          <a:p>
-            <a:pPr marL="0" indent="0">
-              <a:buNone/>
-            </a:pPr>
-            <a:r>
-              <a:rPr lang="en-US" sz="1200" b="1" dirty="0">
-                <a:solidFill>
-                  <a:srgbClr val="B7950B"/>
-                </a:solidFill>
-                <a:latin typeface="Calibri" pitchFamily="34" charset="0"/>
-                <a:ea typeface="Calibri" pitchFamily="34" charset="-122"/>
-                <a:cs typeface="Calibri" pitchFamily="34" charset="-120"/>
-              </a:rPr>
-              <a:t>Features insuficientes</a:t>
-            </a:r>
-            <a:endParaRPr lang="en-US" sz="1200" dirty="0"/>
-          </a:p>
-        </p:txBody>
-      </p:sp>
-      <p:sp>
-        <p:nvSpPr>
           <p:cNvPr id="25" name="Text 23"/>
           <p:cNvSpPr/>
           <p:nvPr/>
         </p:nvSpPr>
         <p:spPr>
           <a:xfrm>
-            <a:off x="6309360" y="3456432"/>
+            <a:off x="3566160" y="3438144"/>
             <a:ext cx="2468880" cy="1143000"/>
           </a:xfrm>
           <a:prstGeom prst="rect">
@@ -8007,593 +7903,6 @@
               <a:t>Publicar em Streamlit Cloud com retreinamento auto</a:t>
             </a:r>
             <a:endParaRPr lang="en-US" sz="1200" dirty="0"/>
-          </a:p>
-        </p:txBody>
-      </p:sp>
-    </p:spTree>
-  </p:cSld>
-  <p:clrMapOvr>
-    <a:masterClrMapping/>
-  </p:clrMapOvr>
-</p:sld>
-</file>
-
-<file path=ppt/slides/slide9.xml><?xml version="1.0" encoding="utf-8"?>
-<p:sld xmlns:a="http://schemas.openxmlformats.org/drawingml/2006/main" xmlns:r="http://schemas.openxmlformats.org/officeDocument/2006/relationships" xmlns:p="http://schemas.openxmlformats.org/presentationml/2006/main">
-  <p:cSld name="Slide 9">
-    <p:bg>
-      <p:bgPr>
-        <a:solidFill>
-          <a:srgbClr val="0D2137"/>
-        </a:solidFill>
-        <a:effectLst/>
-      </p:bgPr>
-    </p:bg>
-    <p:spTree>
-      <p:nvGrpSpPr>
-        <p:cNvPr id="1" name=""/>
-        <p:cNvGrpSpPr/>
-        <p:nvPr/>
-      </p:nvGrpSpPr>
-      <p:grpSpPr>
-        <a:xfrm>
-          <a:off x="0" y="0"/>
-          <a:ext cx="0" cy="0"/>
-          <a:chOff x="0" y="0"/>
-          <a:chExt cx="0" cy="0"/>
-        </a:xfrm>
-      </p:grpSpPr>
-      <p:sp>
-        <p:nvSpPr>
-          <p:cNvPr id="2" name="Text 0"/>
-          <p:cNvSpPr/>
-          <p:nvPr/>
-        </p:nvSpPr>
-        <p:spPr>
-          <a:xfrm>
-            <a:off x="457200" y="228600"/>
-            <a:ext cx="8229600" cy="594360"/>
-          </a:xfrm>
-          <a:prstGeom prst="rect">
-            <a:avLst/>
-          </a:prstGeom>
-          <a:noFill/>
-          <a:ln/>
-        </p:spPr>
-        <p:txBody>
-          <a:bodyPr wrap="square" rtlCol="0" anchor="ctr"/>
-          <a:lstStyle/>
-          <a:p>
-            <a:pPr marL="0" indent="0" algn="ctr">
-              <a:buNone/>
-            </a:pPr>
-            <a:r>
-              <a:rPr lang="en-US" sz="3000" b="1" dirty="0">
-                <a:solidFill>
-                  <a:srgbClr val="FFFFFF"/>
-                </a:solidFill>
-                <a:latin typeface="Calibri" pitchFamily="34" charset="0"/>
-                <a:ea typeface="Calibri" pitchFamily="34" charset="-122"/>
-                <a:cs typeface="Calibri" pitchFamily="34" charset="-120"/>
-              </a:rPr>
-              <a:t>Perguntas Frequentes</a:t>
-            </a:r>
-            <a:endParaRPr lang="en-US" sz="3000" dirty="0"/>
-          </a:p>
-        </p:txBody>
-      </p:sp>
-      <p:sp>
-        <p:nvSpPr>
-          <p:cNvPr id="3" name="Text 1"/>
-          <p:cNvSpPr/>
-          <p:nvPr/>
-        </p:nvSpPr>
-        <p:spPr>
-          <a:xfrm>
-            <a:off x="457200" y="841248"/>
-            <a:ext cx="8229600" cy="320040"/>
-          </a:xfrm>
-          <a:prstGeom prst="rect">
-            <a:avLst/>
-          </a:prstGeom>
-          <a:noFill/>
-          <a:ln/>
-        </p:spPr>
-        <p:txBody>
-          <a:bodyPr wrap="square" rtlCol="0" anchor="ctr"/>
-          <a:lstStyle/>
-          <a:p>
-            <a:pPr marL="0" indent="0" algn="ctr">
-              <a:buNone/>
-            </a:pPr>
-            <a:r>
-              <a:rPr lang="en-US" sz="1300" dirty="0">
-                <a:solidFill>
-                  <a:srgbClr val="A9CCE3"/>
-                </a:solidFill>
-                <a:latin typeface="Calibri" pitchFamily="34" charset="0"/>
-                <a:ea typeface="Calibri" pitchFamily="34" charset="-122"/>
-                <a:cs typeface="Calibri" pitchFamily="34" charset="-120"/>
-              </a:rPr>
-              <a:t>Q&amp;A — Preparação para o Docente</a:t>
-            </a:r>
-            <a:endParaRPr lang="en-US" sz="1300" dirty="0"/>
-          </a:p>
-        </p:txBody>
-      </p:sp>
-      <p:sp>
-        <p:nvSpPr>
-          <p:cNvPr id="4" name="Shape 2"/>
-          <p:cNvSpPr/>
-          <p:nvPr/>
-        </p:nvSpPr>
-        <p:spPr>
-          <a:xfrm>
-            <a:off x="320040" y="1417320"/>
-            <a:ext cx="4114800" cy="1600200"/>
-          </a:xfrm>
-          <a:prstGeom prst="roundRect">
-            <a:avLst>
-              <a:gd name="adj" fmla="val 5714"/>
-            </a:avLst>
-          </a:prstGeom>
-          <a:solidFill>
-            <a:srgbClr val="1A3A50"/>
-          </a:solidFill>
-          <a:ln w="12700">
-            <a:solidFill>
-              <a:srgbClr val="148F77"/>
-            </a:solidFill>
-            <a:prstDash val="solid"/>
-          </a:ln>
-          <a:effectLst>
-            <a:outerShdw blurRad="76200" dist="25400" dir="2700000" algn="bl" rotWithShape="0">
-              <a:srgbClr val="000000">
-                <a:alpha val="12000"/>
-              </a:srgbClr>
-            </a:outerShdw>
-          </a:effectLst>
-        </p:spPr>
-        <p:txBody>
-          <a:bodyPr/>
-          <a:lstStyle/>
-          <a:p>
-            <a:endParaRPr lang="pt-PT"/>
-          </a:p>
-        </p:txBody>
-      </p:sp>
-      <p:sp>
-        <p:nvSpPr>
-          <p:cNvPr id="5" name="Text 3"/>
-          <p:cNvSpPr/>
-          <p:nvPr/>
-        </p:nvSpPr>
-        <p:spPr>
-          <a:xfrm>
-            <a:off x="457200" y="1508760"/>
-            <a:ext cx="3840480" cy="502920"/>
-          </a:xfrm>
-          <a:prstGeom prst="rect">
-            <a:avLst/>
-          </a:prstGeom>
-          <a:noFill/>
-          <a:ln/>
-        </p:spPr>
-        <p:txBody>
-          <a:bodyPr wrap="square" rtlCol="0" anchor="ctr"/>
-          <a:lstStyle/>
-          <a:p>
-            <a:pPr marL="0" indent="0">
-              <a:buNone/>
-            </a:pPr>
-            <a:r>
-              <a:rPr lang="en-US" sz="1150" b="1" dirty="0">
-                <a:solidFill>
-                  <a:srgbClr val="148F77"/>
-                </a:solidFill>
-                <a:latin typeface="Calibri" pitchFamily="34" charset="0"/>
-                <a:ea typeface="Calibri" pitchFamily="34" charset="-122"/>
-                <a:cs typeface="Calibri" pitchFamily="34" charset="-120"/>
-              </a:rPr>
-              <a:t>Q: Porque é que o R² é negativo?</a:t>
-            </a:r>
-            <a:endParaRPr lang="en-US" sz="1150" dirty="0"/>
-          </a:p>
-        </p:txBody>
-      </p:sp>
-      <p:sp>
-        <p:nvSpPr>
-          <p:cNvPr id="6" name="Text 4"/>
-          <p:cNvSpPr/>
-          <p:nvPr/>
-        </p:nvSpPr>
-        <p:spPr>
-          <a:xfrm>
-            <a:off x="457200" y="2011680"/>
-            <a:ext cx="3840480" cy="914400"/>
-          </a:xfrm>
-          <a:prstGeom prst="rect">
-            <a:avLst/>
-          </a:prstGeom>
-          <a:noFill/>
-          <a:ln/>
-        </p:spPr>
-        <p:txBody>
-          <a:bodyPr wrap="square" rtlCol="0" anchor="ctr"/>
-          <a:lstStyle/>
-          <a:p>
-            <a:pPr marL="0" indent="0">
-              <a:buNone/>
-            </a:pPr>
-            <a:r>
-              <a:rPr lang="en-US" sz="1100" dirty="0">
-                <a:solidFill>
-                  <a:srgbClr val="D6EAF8"/>
-                </a:solidFill>
-                <a:latin typeface="Calibri" pitchFamily="34" charset="0"/>
-                <a:ea typeface="Calibri" pitchFamily="34" charset="-122"/>
-                <a:cs typeface="Calibri" pitchFamily="34" charset="-120"/>
-              </a:rPr>
-              <a:t>R: Dataset misto (venda + arrendamento) sem etiqueta e apenas 34 amostras. O pipeline está correcto; faltam dados.</a:t>
-            </a:r>
-            <a:endParaRPr lang="en-US" sz="1100" dirty="0"/>
-          </a:p>
-        </p:txBody>
-      </p:sp>
-      <p:sp>
-        <p:nvSpPr>
-          <p:cNvPr id="7" name="Shape 5"/>
-          <p:cNvSpPr/>
-          <p:nvPr/>
-        </p:nvSpPr>
-        <p:spPr>
-          <a:xfrm>
-            <a:off x="4754880" y="1417320"/>
-            <a:ext cx="4114800" cy="1600200"/>
-          </a:xfrm>
-          <a:prstGeom prst="roundRect">
-            <a:avLst>
-              <a:gd name="adj" fmla="val 5714"/>
-            </a:avLst>
-          </a:prstGeom>
-          <a:solidFill>
-            <a:srgbClr val="1A3A50"/>
-          </a:solidFill>
-          <a:ln w="12700">
-            <a:solidFill>
-              <a:srgbClr val="148F77"/>
-            </a:solidFill>
-            <a:prstDash val="solid"/>
-          </a:ln>
-          <a:effectLst>
-            <a:outerShdw blurRad="76200" dist="25400" dir="2700000" algn="bl" rotWithShape="0">
-              <a:srgbClr val="000000">
-                <a:alpha val="12000"/>
-              </a:srgbClr>
-            </a:outerShdw>
-          </a:effectLst>
-        </p:spPr>
-        <p:txBody>
-          <a:bodyPr/>
-          <a:lstStyle/>
-          <a:p>
-            <a:endParaRPr lang="pt-PT"/>
-          </a:p>
-        </p:txBody>
-      </p:sp>
-      <p:sp>
-        <p:nvSpPr>
-          <p:cNvPr id="8" name="Text 6"/>
-          <p:cNvSpPr/>
-          <p:nvPr/>
-        </p:nvSpPr>
-        <p:spPr>
-          <a:xfrm>
-            <a:off x="4892040" y="1508760"/>
-            <a:ext cx="3840480" cy="502920"/>
-          </a:xfrm>
-          <a:prstGeom prst="rect">
-            <a:avLst/>
-          </a:prstGeom>
-          <a:noFill/>
-          <a:ln/>
-        </p:spPr>
-        <p:txBody>
-          <a:bodyPr wrap="square" rtlCol="0" anchor="ctr"/>
-          <a:lstStyle/>
-          <a:p>
-            <a:pPr marL="0" indent="0">
-              <a:buNone/>
-            </a:pPr>
-            <a:r>
-              <a:rPr lang="en-US" sz="1150" b="1" dirty="0">
-                <a:solidFill>
-                  <a:srgbClr val="148F77"/>
-                </a:solidFill>
-                <a:latin typeface="Calibri" pitchFamily="34" charset="0"/>
-                <a:ea typeface="Calibri" pitchFamily="34" charset="-122"/>
-                <a:cs typeface="Calibri" pitchFamily="34" charset="-120"/>
-              </a:rPr>
-              <a:t>Q: Porque Regressão Linear e não Random Forest?</a:t>
-            </a:r>
-            <a:endParaRPr lang="en-US" sz="1150" dirty="0"/>
-          </a:p>
-        </p:txBody>
-      </p:sp>
-      <p:sp>
-        <p:nvSpPr>
-          <p:cNvPr id="9" name="Text 7"/>
-          <p:cNvSpPr/>
-          <p:nvPr/>
-        </p:nvSpPr>
-        <p:spPr>
-          <a:xfrm>
-            <a:off x="4892040" y="2011680"/>
-            <a:ext cx="3840480" cy="914400"/>
-          </a:xfrm>
-          <a:prstGeom prst="rect">
-            <a:avLst/>
-          </a:prstGeom>
-          <a:noFill/>
-          <a:ln/>
-        </p:spPr>
-        <p:txBody>
-          <a:bodyPr wrap="square" rtlCol="0" anchor="ctr"/>
-          <a:lstStyle/>
-          <a:p>
-            <a:pPr marL="0" indent="0">
-              <a:buNone/>
-            </a:pPr>
-            <a:r>
-              <a:rPr lang="en-US" sz="1100" dirty="0">
-                <a:solidFill>
-                  <a:srgbClr val="D6EAF8"/>
-                </a:solidFill>
-                <a:latin typeface="Calibri" pitchFamily="34" charset="0"/>
-                <a:ea typeface="Calibri" pitchFamily="34" charset="-122"/>
-                <a:cs typeface="Calibri" pitchFamily="34" charset="-120"/>
-              </a:rPr>
-              <a:t>R: Com 34 amostras, modelos mais complexos overfitam. A RL é mais interpretável e robusta nesta escala.</a:t>
-            </a:r>
-            <a:endParaRPr lang="en-US" sz="1100" dirty="0"/>
-          </a:p>
-        </p:txBody>
-      </p:sp>
-      <p:sp>
-        <p:nvSpPr>
-          <p:cNvPr id="10" name="Shape 8"/>
-          <p:cNvSpPr/>
-          <p:nvPr/>
-        </p:nvSpPr>
-        <p:spPr>
-          <a:xfrm>
-            <a:off x="320040" y="3200400"/>
-            <a:ext cx="4114800" cy="1600200"/>
-          </a:xfrm>
-          <a:prstGeom prst="roundRect">
-            <a:avLst>
-              <a:gd name="adj" fmla="val 5714"/>
-            </a:avLst>
-          </a:prstGeom>
-          <a:solidFill>
-            <a:srgbClr val="1A3A50"/>
-          </a:solidFill>
-          <a:ln w="12700">
-            <a:solidFill>
-              <a:srgbClr val="148F77"/>
-            </a:solidFill>
-            <a:prstDash val="solid"/>
-          </a:ln>
-          <a:effectLst>
-            <a:outerShdw blurRad="76200" dist="25400" dir="2700000" algn="bl" rotWithShape="0">
-              <a:srgbClr val="000000">
-                <a:alpha val="12000"/>
-              </a:srgbClr>
-            </a:outerShdw>
-          </a:effectLst>
-        </p:spPr>
-        <p:txBody>
-          <a:bodyPr/>
-          <a:lstStyle/>
-          <a:p>
-            <a:endParaRPr lang="pt-PT"/>
-          </a:p>
-        </p:txBody>
-      </p:sp>
-      <p:sp>
-        <p:nvSpPr>
-          <p:cNvPr id="11" name="Text 9"/>
-          <p:cNvSpPr/>
-          <p:nvPr/>
-        </p:nvSpPr>
-        <p:spPr>
-          <a:xfrm>
-            <a:off x="457200" y="3291840"/>
-            <a:ext cx="3840480" cy="502920"/>
-          </a:xfrm>
-          <a:prstGeom prst="rect">
-            <a:avLst/>
-          </a:prstGeom>
-          <a:noFill/>
-          <a:ln/>
-        </p:spPr>
-        <p:txBody>
-          <a:bodyPr wrap="square" rtlCol="0" anchor="ctr"/>
-          <a:lstStyle/>
-          <a:p>
-            <a:pPr marL="0" indent="0">
-              <a:buNone/>
-            </a:pPr>
-            <a:r>
-              <a:rPr lang="en-US" sz="1150" b="1" dirty="0">
-                <a:solidFill>
-                  <a:srgbClr val="148F77"/>
-                </a:solidFill>
-                <a:latin typeface="Calibri" pitchFamily="34" charset="0"/>
-                <a:ea typeface="Calibri" pitchFamily="34" charset="-122"/>
-                <a:cs typeface="Calibri" pitchFamily="34" charset="-120"/>
-              </a:rPr>
-              <a:t>Q: Porque o preço desce ao aumentar a área?</a:t>
-            </a:r>
-            <a:endParaRPr lang="en-US" sz="1150" dirty="0"/>
-          </a:p>
-        </p:txBody>
-      </p:sp>
-      <p:sp>
-        <p:nvSpPr>
-          <p:cNvPr id="12" name="Text 10"/>
-          <p:cNvSpPr/>
-          <p:nvPr/>
-        </p:nvSpPr>
-        <p:spPr>
-          <a:xfrm>
-            <a:off x="457200" y="3794760"/>
-            <a:ext cx="3840480" cy="914400"/>
-          </a:xfrm>
-          <a:prstGeom prst="rect">
-            <a:avLst/>
-          </a:prstGeom>
-          <a:noFill/>
-          <a:ln/>
-        </p:spPr>
-        <p:txBody>
-          <a:bodyPr wrap="square" rtlCol="0" anchor="ctr"/>
-          <a:lstStyle/>
-          <a:p>
-            <a:pPr marL="0" indent="0">
-              <a:buNone/>
-            </a:pPr>
-            <a:r>
-              <a:rPr lang="en-US" sz="1100" dirty="0">
-                <a:solidFill>
-                  <a:srgbClr val="D6EAF8"/>
-                </a:solidFill>
-                <a:latin typeface="Calibri" pitchFamily="34" charset="0"/>
-                <a:ea typeface="Calibri" pitchFamily="34" charset="-122"/>
-                <a:cs typeface="Calibri" pitchFamily="34" charset="-120"/>
-              </a:rPr>
-              <a:t>R: Casas maiores no dataset são rurais e mais baratas. Com mais dados diversificados, este comportamento corrige-se.</a:t>
-            </a:r>
-            <a:endParaRPr lang="en-US" sz="1100" dirty="0"/>
-          </a:p>
-        </p:txBody>
-      </p:sp>
-      <p:sp>
-        <p:nvSpPr>
-          <p:cNvPr id="13" name="Shape 11"/>
-          <p:cNvSpPr/>
-          <p:nvPr/>
-        </p:nvSpPr>
-        <p:spPr>
-          <a:xfrm>
-            <a:off x="4754880" y="3200400"/>
-            <a:ext cx="4114800" cy="1600200"/>
-          </a:xfrm>
-          <a:prstGeom prst="roundRect">
-            <a:avLst>
-              <a:gd name="adj" fmla="val 5714"/>
-            </a:avLst>
-          </a:prstGeom>
-          <a:solidFill>
-            <a:srgbClr val="1A3A50"/>
-          </a:solidFill>
-          <a:ln w="12700">
-            <a:solidFill>
-              <a:srgbClr val="148F77"/>
-            </a:solidFill>
-            <a:prstDash val="solid"/>
-          </a:ln>
-          <a:effectLst>
-            <a:outerShdw blurRad="76200" dist="25400" dir="2700000" algn="bl" rotWithShape="0">
-              <a:srgbClr val="000000">
-                <a:alpha val="12000"/>
-              </a:srgbClr>
-            </a:outerShdw>
-          </a:effectLst>
-        </p:spPr>
-        <p:txBody>
-          <a:bodyPr/>
-          <a:lstStyle/>
-          <a:p>
-            <a:endParaRPr lang="pt-PT"/>
-          </a:p>
-        </p:txBody>
-      </p:sp>
-      <p:sp>
-        <p:nvSpPr>
-          <p:cNvPr id="14" name="Text 12"/>
-          <p:cNvSpPr/>
-          <p:nvPr/>
-        </p:nvSpPr>
-        <p:spPr>
-          <a:xfrm>
-            <a:off x="4892040" y="3291840"/>
-            <a:ext cx="3840480" cy="502920"/>
-          </a:xfrm>
-          <a:prstGeom prst="rect">
-            <a:avLst/>
-          </a:prstGeom>
-          <a:noFill/>
-          <a:ln/>
-        </p:spPr>
-        <p:txBody>
-          <a:bodyPr wrap="square" rtlCol="0" anchor="ctr"/>
-          <a:lstStyle/>
-          <a:p>
-            <a:pPr marL="0" indent="0">
-              <a:buNone/>
-            </a:pPr>
-            <a:r>
-              <a:rPr lang="en-US" sz="1150" b="1" dirty="0">
-                <a:solidFill>
-                  <a:srgbClr val="148F77"/>
-                </a:solidFill>
-                <a:latin typeface="Calibri" pitchFamily="34" charset="0"/>
-                <a:ea typeface="Calibri" pitchFamily="34" charset="-122"/>
-                <a:cs typeface="Calibri" pitchFamily="34" charset="-120"/>
-              </a:rPr>
-              <a:t>Q: Por que não incluíram localização?</a:t>
-            </a:r>
-            <a:endParaRPr lang="en-US" sz="1150" dirty="0"/>
-          </a:p>
-        </p:txBody>
-      </p:sp>
-      <p:sp>
-        <p:nvSpPr>
-          <p:cNvPr id="15" name="Text 13"/>
-          <p:cNvSpPr/>
-          <p:nvPr/>
-        </p:nvSpPr>
-        <p:spPr>
-          <a:xfrm>
-            <a:off x="4892040" y="3794760"/>
-            <a:ext cx="3840480" cy="914400"/>
-          </a:xfrm>
-          <a:prstGeom prst="rect">
-            <a:avLst/>
-          </a:prstGeom>
-          <a:noFill/>
-          <a:ln/>
-        </p:spPr>
-        <p:txBody>
-          <a:bodyPr wrap="square" rtlCol="0" anchor="ctr"/>
-          <a:lstStyle/>
-          <a:p>
-            <a:pPr marL="0" indent="0">
-              <a:buNone/>
-            </a:pPr>
-            <a:r>
-              <a:rPr lang="en-US" sz="1100" dirty="0">
-                <a:solidFill>
-                  <a:srgbClr val="D6EAF8"/>
-                </a:solidFill>
-                <a:latin typeface="Calibri" pitchFamily="34" charset="0"/>
-                <a:ea typeface="Calibri" pitchFamily="34" charset="-122"/>
-                <a:cs typeface="Calibri" pitchFamily="34" charset="-120"/>
-              </a:rPr>
-              <a:t>R: Encoding corrompido nos campos de texto do scraper (ex: 'Guimarães' → 'Guimar e'). A feature foi excluída até nova recolha.</a:t>
-            </a:r>
-            <a:endParaRPr lang="en-US" sz="1100" dirty="0"/>
           </a:p>
         </p:txBody>
       </p:sp>
